--- a/CS50_Cybersecurity_Final_Project_Shibu.pptx
+++ b/CS50_Cybersecurity_Final_Project_Shibu.pptx
@@ -4334,7 +4334,7 @@
         <p:spPr>
           <a:xfrm>
             <a:off x="822960" y="5989320"/>
-            <a:ext cx="10698480" cy="256032"/>
+            <a:ext cx="10698480" cy="206210"/>
           </a:xfrm>
           <a:prstGeom prst="rect">
             <a:avLst/>
@@ -4348,13 +4348,31 @@
           <a:lstStyle/>
           <a:p>
             <a:r>
-              <a:rPr sz="1100" b="1">
+              <a:rPr sz="1100" b="1" dirty="0">
                 <a:solidFill>
                   <a:srgbClr val="E57E2D"/>
                 </a:solidFill>
                 <a:latin typeface="Aptos"/>
               </a:rPr>
-              <a:t>Before recording: replace [ENTER ACTUAL RECORDING DATE] with the date you record.</a:t>
+              <a:t>Before recording: replace </a:t>
+            </a:r>
+            <a:r>
+              <a:rPr lang="en-IN" sz="1100" b="1" dirty="0">
+                <a:solidFill>
+                  <a:srgbClr val="E57E2D"/>
+                </a:solidFill>
+                <a:latin typeface="Aptos"/>
+              </a:rPr>
+              <a:t> 16-10-2026 </a:t>
+            </a:r>
+            <a:r>
+              <a:rPr sz="1100" b="1" dirty="0">
+                <a:solidFill>
+                  <a:srgbClr val="E57E2D"/>
+                </a:solidFill>
+                <a:latin typeface="Aptos"/>
+              </a:rPr>
+              <a:t>with the date you record.</a:t>
             </a:r>
           </a:p>
         </p:txBody>
